--- a/outputs/05_発表スライド.pptx
+++ b/outputs/05_発表スライド.pptx
@@ -4688,12 +4688,39 @@
             <a:r>
               <a:rPr sz="1050" b="0">
                 <a:solidFill>
+                  <a:srgbClr val="5BC8FF"/>
+                </a:solidFill>
+                <a:latin typeface="Arial"/>
+                <a:ea typeface="Meiryo"/>
+              </a:rPr>
+              <a:t>“国しか客になれない国産インフラ”＝普通のソフトの約1.7倍の値札</a:t>
+            </a:r>
+          </a:p>
+          <a:p>
+            <a:pPr algn="l">
+              <a:lnSpc>
+                <a:spcPct val="118000"/>
+              </a:lnSpc>
+            </a:pPr>
+            <a:r>
+              <a:rPr sz="1050" b="0">
+                <a:solidFill>
                   <a:srgbClr val="9DB0D0"/>
                 </a:solidFill>
                 <a:latin typeface="Arial"/>
                 <a:ea typeface="Meiryo"/>
               </a:rPr>
-              <a:t>comps採用群 {Planet6・Synspective7・BlackSky10・Anduril14・Palantirプレ20}</a:t>
+              <a:t>comps中央値10倍 ＋ ソフト+3／粗利+2／主権+2 ＝ </a:t>
+            </a:r>
+            <a:r>
+              <a:rPr sz="1050" b="1">
+                <a:solidFill>
+                  <a:srgbClr val="F5B454"/>
+                </a:solidFill>
+                <a:latin typeface="Arial"/>
+                <a:ea typeface="Meiryo"/>
+              </a:rPr>
+              <a:t>17倍</a:t>
             </a:r>
           </a:p>
           <a:p>
@@ -4703,33 +4730,6 @@
               </a:lnSpc>
             </a:pPr>
             <a:r>
-              <a:rPr sz="1050" b="0">
-                <a:solidFill>
-                  <a:srgbClr val="9DB0D0"/>
-                </a:solidFill>
-                <a:latin typeface="Arial"/>
-                <a:ea typeface="Meiryo"/>
-              </a:rPr>
-              <a:t>中央値10倍 ＋ ソフト+3／粗利+2／主権プレミアム+2 ＝ </a:t>
-            </a:r>
-            <a:r>
-              <a:rPr sz="1050" b="1">
-                <a:solidFill>
-                  <a:srgbClr val="F5B454"/>
-                </a:solidFill>
-                <a:latin typeface="Arial"/>
-                <a:ea typeface="Meiryo"/>
-              </a:rPr>
-              <a:t>17倍</a:t>
-            </a:r>
-          </a:p>
-          <a:p>
-            <a:pPr algn="l">
-              <a:lnSpc>
-                <a:spcPct val="118000"/>
-              </a:lnSpc>
-            </a:pPr>
-            <a:r>
               <a:rPr sz="1000" b="0">
                 <a:solidFill>
                   <a:srgbClr val="6E7FA6"/>
@@ -4737,7 +4737,7 @@
                 <a:latin typeface="Arial"/>
                 <a:ea typeface="Meiryo"/>
               </a:rPr>
-              <a:t>Palantir現況60.7倍はバブル局面として明示除外</a:t>
+              <a:t>Palantirプレ20・現況60.7倍はバブルとして除外</a:t>
             </a:r>
           </a:p>
         </p:txBody>
@@ -5286,7 +5286,7 @@
                 <a:latin typeface="Arial"/>
                 <a:ea typeface="Meiryo"/>
               </a:rPr>
-              <a:t>Solafune 206億 ＋ べき乗則10社 → </a:t>
+              <a:t>実在2本（Solafune＋Humanity Brain）に厚く張り → </a:t>
             </a:r>
             <a:r>
               <a:rPr sz="1350" b="1">
@@ -5704,7 +5704,7 @@
                 <a:latin typeface="Arial"/>
                 <a:ea typeface="Meiryo"/>
               </a:rPr>
-              <a:t>認知戦AI・7-8X｜実在</a:t>
+              <a:t>ニセ情報耐性AI・7-8X｜実在</a:t>
             </a:r>
           </a:p>
         </p:txBody>
@@ -6856,7 +6856,7 @@
                 <a:latin typeface="Arial"/>
                 <a:ea typeface="Meiryo"/>
               </a:rPr>
-              <a:t>少数の当たりで勝つ＝VCのべき乗則を体現。</a:t>
+              <a:t>理想の薄い裾より、検証可能な実弾2本に厚く張る集中設計。</a:t>
             </a:r>
           </a:p>
         </p:txBody>
